--- a/lessons/1-3/slides.pptx
+++ b/lessons/1-3/slides.pptx
@@ -11006,7 +11006,7 @@
       </p:sp>
       <p:sp>
         <p:nvSpPr>
-          <p:cNvPr id="20" name="Shape 18"/>
+          <p:cNvPr id="20" name="Text 18"/>
           <p:cNvSpPr/>
           <p:nvPr/>
         </p:nvSpPr>
@@ -11027,33 +11027,7 @@
             <a:solidFill>
               <a:srgbClr val="D6DBDF"/>
             </a:solidFill>
-            <a:prstDash val="solid"/>
           </a:ln>
-          <a:effectLst>
-            <a:outerShdw sx="100000" sy="100000" kx="0" ky="0" algn="bl" rotWithShape="0" blurRad="50800" dist="12700" dir="5400000">
-              <a:srgbClr val="1C2E42">
-                <a:alpha val="10000"/>
-              </a:srgbClr>
-            </a:outerShdw>
-          </a:effectLst>
-        </p:spPr>
-      </p:sp>
-      <p:sp>
-        <p:nvSpPr>
-          <p:cNvPr id="21" name="Text 19"/>
-          <p:cNvSpPr/>
-          <p:nvPr/>
-        </p:nvSpPr>
-        <p:spPr>
-          <a:xfrm>
-            <a:off x="685800" y="1481328"/>
-            <a:ext cx="1447800" cy="384048"/>
-          </a:xfrm>
-          <a:prstGeom prst="rect">
-            <a:avLst/>
-          </a:prstGeom>
-          <a:noFill/>
-          <a:ln/>
         </p:spPr>
         <p:txBody>
           <a:bodyPr wrap="square" rtlCol="0" anchor="ctr"/>
@@ -11063,7 +11037,7 @@
               <a:buNone/>
             </a:pPr>
             <a:r>
-              <a:rPr lang="en-US" sz="900" dirty="0">
+              <a:rPr lang="en-US" sz="900" b="1" dirty="0">
                 <a:solidFill>
                   <a:srgbClr val="17324D"/>
                 </a:solidFill>
@@ -11079,7 +11053,7 @@
       </p:sp>
       <p:sp>
         <p:nvSpPr>
-          <p:cNvPr id="22" name="Shape 20"/>
+          <p:cNvPr id="21" name="Text 19"/>
           <p:cNvSpPr/>
           <p:nvPr/>
         </p:nvSpPr>
@@ -11100,33 +11074,7 @@
             <a:solidFill>
               <a:srgbClr val="D6DBDF"/>
             </a:solidFill>
-            <a:prstDash val="solid"/>
           </a:ln>
-          <a:effectLst>
-            <a:outerShdw sx="100000" sy="100000" kx="0" ky="0" algn="bl" rotWithShape="0" blurRad="50800" dist="12700" dir="5400000">
-              <a:srgbClr val="1C2E42">
-                <a:alpha val="10000"/>
-              </a:srgbClr>
-            </a:outerShdw>
-          </a:effectLst>
-        </p:spPr>
-      </p:sp>
-      <p:sp>
-        <p:nvSpPr>
-          <p:cNvPr id="23" name="Text 21"/>
-          <p:cNvSpPr/>
-          <p:nvPr/>
-        </p:nvSpPr>
-        <p:spPr>
-          <a:xfrm>
-            <a:off x="2453640" y="1481328"/>
-            <a:ext cx="1447800" cy="384048"/>
-          </a:xfrm>
-          <a:prstGeom prst="rect">
-            <a:avLst/>
-          </a:prstGeom>
-          <a:noFill/>
-          <a:ln/>
         </p:spPr>
         <p:txBody>
           <a:bodyPr wrap="square" rtlCol="0" anchor="ctr"/>
@@ -11136,7 +11084,7 @@
               <a:buNone/>
             </a:pPr>
             <a:r>
-              <a:rPr lang="en-US" sz="900" dirty="0">
+              <a:rPr lang="en-US" sz="900" b="1" dirty="0">
                 <a:solidFill>
                   <a:srgbClr val="17324D"/>
                 </a:solidFill>
@@ -11152,7 +11100,7 @@
       </p:sp>
       <p:sp>
         <p:nvSpPr>
-          <p:cNvPr id="24" name="Shape 22"/>
+          <p:cNvPr id="22" name="Text 20"/>
           <p:cNvSpPr/>
           <p:nvPr/>
         </p:nvSpPr>
@@ -11173,33 +11121,7 @@
             <a:solidFill>
               <a:srgbClr val="D6DBDF"/>
             </a:solidFill>
-            <a:prstDash val="solid"/>
           </a:ln>
-          <a:effectLst>
-            <a:outerShdw sx="100000" sy="100000" kx="0" ky="0" algn="bl" rotWithShape="0" blurRad="50800" dist="12700" dir="5400000">
-              <a:srgbClr val="1C2E42">
-                <a:alpha val="10000"/>
-              </a:srgbClr>
-            </a:outerShdw>
-          </a:effectLst>
-        </p:spPr>
-      </p:sp>
-      <p:sp>
-        <p:nvSpPr>
-          <p:cNvPr id="25" name="Text 23"/>
-          <p:cNvSpPr/>
-          <p:nvPr/>
-        </p:nvSpPr>
-        <p:spPr>
-          <a:xfrm>
-            <a:off x="4221480" y="1481328"/>
-            <a:ext cx="1447800" cy="384048"/>
-          </a:xfrm>
-          <a:prstGeom prst="rect">
-            <a:avLst/>
-          </a:prstGeom>
-          <a:noFill/>
-          <a:ln/>
         </p:spPr>
         <p:txBody>
           <a:bodyPr wrap="square" rtlCol="0" anchor="ctr"/>
@@ -11209,7 +11131,7 @@
               <a:buNone/>
             </a:pPr>
             <a:r>
-              <a:rPr lang="en-US" sz="900" dirty="0">
+              <a:rPr lang="en-US" sz="900" b="1" dirty="0">
                 <a:solidFill>
                   <a:srgbClr val="17324D"/>
                 </a:solidFill>
@@ -11225,7 +11147,7 @@
       </p:sp>
       <p:sp>
         <p:nvSpPr>
-          <p:cNvPr id="26" name="Shape 24"/>
+          <p:cNvPr id="23" name="Text 21"/>
           <p:cNvSpPr/>
           <p:nvPr/>
         </p:nvSpPr>
@@ -11246,33 +11168,7 @@
             <a:solidFill>
               <a:srgbClr val="D6DBDF"/>
             </a:solidFill>
-            <a:prstDash val="solid"/>
           </a:ln>
-          <a:effectLst>
-            <a:outerShdw sx="100000" sy="100000" kx="0" ky="0" algn="bl" rotWithShape="0" blurRad="50800" dist="12700" dir="5400000">
-              <a:srgbClr val="1C2E42">
-                <a:alpha val="10000"/>
-              </a:srgbClr>
-            </a:outerShdw>
-          </a:effectLst>
-        </p:spPr>
-      </p:sp>
-      <p:sp>
-        <p:nvSpPr>
-          <p:cNvPr id="27" name="Text 25"/>
-          <p:cNvSpPr/>
-          <p:nvPr/>
-        </p:nvSpPr>
-        <p:spPr>
-          <a:xfrm>
-            <a:off x="685800" y="1975104"/>
-            <a:ext cx="1447800" cy="384048"/>
-          </a:xfrm>
-          <a:prstGeom prst="rect">
-            <a:avLst/>
-          </a:prstGeom>
-          <a:noFill/>
-          <a:ln/>
         </p:spPr>
         <p:txBody>
           <a:bodyPr wrap="square" rtlCol="0" anchor="ctr"/>
@@ -11282,7 +11178,7 @@
               <a:buNone/>
             </a:pPr>
             <a:r>
-              <a:rPr lang="en-US" sz="900" dirty="0">
+              <a:rPr lang="en-US" sz="900" b="1" dirty="0">
                 <a:solidFill>
                   <a:srgbClr val="17324D"/>
                 </a:solidFill>
@@ -11298,7 +11194,7 @@
       </p:sp>
       <p:sp>
         <p:nvSpPr>
-          <p:cNvPr id="28" name="Shape 26"/>
+          <p:cNvPr id="24" name="Text 22"/>
           <p:cNvSpPr/>
           <p:nvPr/>
         </p:nvSpPr>
@@ -11319,33 +11215,7 @@
             <a:solidFill>
               <a:srgbClr val="D6DBDF"/>
             </a:solidFill>
-            <a:prstDash val="solid"/>
           </a:ln>
-          <a:effectLst>
-            <a:outerShdw sx="100000" sy="100000" kx="0" ky="0" algn="bl" rotWithShape="0" blurRad="50800" dist="12700" dir="5400000">
-              <a:srgbClr val="1C2E42">
-                <a:alpha val="10000"/>
-              </a:srgbClr>
-            </a:outerShdw>
-          </a:effectLst>
-        </p:spPr>
-      </p:sp>
-      <p:sp>
-        <p:nvSpPr>
-          <p:cNvPr id="29" name="Text 27"/>
-          <p:cNvSpPr/>
-          <p:nvPr/>
-        </p:nvSpPr>
-        <p:spPr>
-          <a:xfrm>
-            <a:off x="2453640" y="1975104"/>
-            <a:ext cx="1447800" cy="384048"/>
-          </a:xfrm>
-          <a:prstGeom prst="rect">
-            <a:avLst/>
-          </a:prstGeom>
-          <a:noFill/>
-          <a:ln/>
         </p:spPr>
         <p:txBody>
           <a:bodyPr wrap="square" rtlCol="0" anchor="ctr"/>
@@ -11355,7 +11225,7 @@
               <a:buNone/>
             </a:pPr>
             <a:r>
-              <a:rPr lang="en-US" sz="900" dirty="0">
+              <a:rPr lang="en-US" sz="900" b="1" dirty="0">
                 <a:solidFill>
                   <a:srgbClr val="17324D"/>
                 </a:solidFill>
@@ -11371,7 +11241,7 @@
       </p:sp>
       <p:sp>
         <p:nvSpPr>
-          <p:cNvPr id="30" name="Shape 28"/>
+          <p:cNvPr id="25" name="Text 23"/>
           <p:cNvSpPr/>
           <p:nvPr/>
         </p:nvSpPr>
@@ -11392,33 +11262,7 @@
             <a:solidFill>
               <a:srgbClr val="D6DBDF"/>
             </a:solidFill>
-            <a:prstDash val="solid"/>
           </a:ln>
-          <a:effectLst>
-            <a:outerShdw sx="100000" sy="100000" kx="0" ky="0" algn="bl" rotWithShape="0" blurRad="50800" dist="12700" dir="5400000">
-              <a:srgbClr val="1C2E42">
-                <a:alpha val="10000"/>
-              </a:srgbClr>
-            </a:outerShdw>
-          </a:effectLst>
-        </p:spPr>
-      </p:sp>
-      <p:sp>
-        <p:nvSpPr>
-          <p:cNvPr id="31" name="Text 29"/>
-          <p:cNvSpPr/>
-          <p:nvPr/>
-        </p:nvSpPr>
-        <p:spPr>
-          <a:xfrm>
-            <a:off x="4221480" y="1975104"/>
-            <a:ext cx="1447800" cy="384048"/>
-          </a:xfrm>
-          <a:prstGeom prst="rect">
-            <a:avLst/>
-          </a:prstGeom>
-          <a:noFill/>
-          <a:ln/>
         </p:spPr>
         <p:txBody>
           <a:bodyPr wrap="square" rtlCol="0" anchor="ctr"/>
@@ -11428,7 +11272,7 @@
               <a:buNone/>
             </a:pPr>
             <a:r>
-              <a:rPr lang="en-US" sz="900" dirty="0">
+              <a:rPr lang="en-US" sz="900" b="1" dirty="0">
                 <a:solidFill>
                   <a:srgbClr val="17324D"/>
                 </a:solidFill>
@@ -11444,7 +11288,7 @@
       </p:sp>
       <p:sp>
         <p:nvSpPr>
-          <p:cNvPr id="32" name="Shape 30"/>
+          <p:cNvPr id="26" name="Shape 24"/>
           <p:cNvSpPr/>
           <p:nvPr/>
         </p:nvSpPr>
@@ -11478,7 +11322,7 @@
       </p:sp>
       <p:sp>
         <p:nvSpPr>
-          <p:cNvPr id="33" name="Text 31"/>
+          <p:cNvPr id="27" name="Text 25"/>
           <p:cNvSpPr/>
           <p:nvPr/>
         </p:nvSpPr>
@@ -11519,7 +11363,7 @@
       </p:sp>
       <p:sp>
         <p:nvSpPr>
-          <p:cNvPr id="34" name="Shape 32"/>
+          <p:cNvPr id="28" name="Shape 26"/>
           <p:cNvSpPr/>
           <p:nvPr/>
         </p:nvSpPr>
@@ -11553,7 +11397,7 @@
       </p:sp>
       <p:sp>
         <p:nvSpPr>
-          <p:cNvPr id="35" name="Text 33"/>
+          <p:cNvPr id="29" name="Text 27"/>
           <p:cNvSpPr/>
           <p:nvPr/>
         </p:nvSpPr>
@@ -11594,7 +11438,7 @@
       </p:sp>
       <p:sp>
         <p:nvSpPr>
-          <p:cNvPr id="36" name="Shape 34"/>
+          <p:cNvPr id="30" name="Shape 28"/>
           <p:cNvSpPr/>
           <p:nvPr/>
         </p:nvSpPr>
@@ -11628,7 +11472,7 @@
       </p:sp>
       <p:sp>
         <p:nvSpPr>
-          <p:cNvPr id="37" name="Text 35"/>
+          <p:cNvPr id="31" name="Text 29"/>
           <p:cNvSpPr/>
           <p:nvPr/>
         </p:nvSpPr>
@@ -11669,7 +11513,7 @@
       </p:sp>
       <p:sp>
         <p:nvSpPr>
-          <p:cNvPr id="38" name="Text 36"/>
+          <p:cNvPr id="32" name="Text 30"/>
           <p:cNvSpPr/>
           <p:nvPr/>
         </p:nvSpPr>
@@ -11708,7 +11552,7 @@
       </p:sp>
       <p:sp>
         <p:nvSpPr>
-          <p:cNvPr id="39" name="Shape 37"/>
+          <p:cNvPr id="33" name="Shape 31"/>
           <p:cNvSpPr/>
           <p:nvPr/>
         </p:nvSpPr>
@@ -11731,7 +11575,7 @@
       </p:sp>
       <p:sp>
         <p:nvSpPr>
-          <p:cNvPr id="40" name="Shape 38"/>
+          <p:cNvPr id="34" name="Shape 32"/>
           <p:cNvSpPr/>
           <p:nvPr/>
         </p:nvSpPr>
@@ -11754,7 +11598,7 @@
       </p:sp>
       <p:sp>
         <p:nvSpPr>
-          <p:cNvPr id="41" name="Shape 39"/>
+          <p:cNvPr id="35" name="Shape 33"/>
           <p:cNvSpPr/>
           <p:nvPr/>
         </p:nvSpPr>
@@ -11777,7 +11621,7 @@
       </p:sp>
       <p:sp>
         <p:nvSpPr>
-          <p:cNvPr id="42" name="Shape 40"/>
+          <p:cNvPr id="36" name="Shape 34"/>
           <p:cNvSpPr/>
           <p:nvPr/>
         </p:nvSpPr>
@@ -11800,7 +11644,7 @@
       </p:sp>
       <p:sp>
         <p:nvSpPr>
-          <p:cNvPr id="43" name="Shape 41"/>
+          <p:cNvPr id="37" name="Shape 35"/>
           <p:cNvSpPr/>
           <p:nvPr/>
         </p:nvSpPr>

--- a/lessons/1-3/slides.pptx
+++ b/lessons/1-3/slides.pptx
@@ -2584,7 +2584,7 @@
                 <a:ea typeface="Outfit" pitchFamily="34" charset="-122"/>
                 <a:cs typeface="Outfit" pitchFamily="34" charset="-120"/>
               </a:rPr>
-              <a:t>6.NS.4</a:t>
+              <a:t>6.NOS.4</a:t>
             </a:r>
             <a:endParaRPr lang="en-US" sz="1000" dirty="0"/>
           </a:p>
@@ -3307,7 +3307,7 @@
                 <a:ea typeface="Outfit" pitchFamily="34" charset="-122"/>
                 <a:cs typeface="Outfit" pitchFamily="34" charset="-120"/>
               </a:rPr>
-              <a:t>6.NS.4</a:t>
+              <a:t>6.NOS.4</a:t>
             </a:r>
             <a:endParaRPr lang="en-US" sz="900" dirty="0"/>
           </a:p>
@@ -4436,7 +4436,7 @@
                 <a:ea typeface="Outfit" pitchFamily="34" charset="-122"/>
                 <a:cs typeface="Outfit" pitchFamily="34" charset="-120"/>
               </a:rPr>
-              <a:t>6.NS.4</a:t>
+              <a:t>6.NOS.4</a:t>
             </a:r>
             <a:endParaRPr lang="en-US" sz="900" dirty="0"/>
           </a:p>
@@ -5640,7 +5640,7 @@
                 <a:ea typeface="Outfit" pitchFamily="34" charset="-122"/>
                 <a:cs typeface="Outfit" pitchFamily="34" charset="-120"/>
               </a:rPr>
-              <a:t>6.NS.4</a:t>
+              <a:t>6.NOS.4</a:t>
             </a:r>
             <a:endParaRPr lang="en-US" sz="900" dirty="0"/>
           </a:p>
@@ -7043,7 +7043,7 @@
                 <a:ea typeface="Outfit" pitchFamily="34" charset="-122"/>
                 <a:cs typeface="Outfit" pitchFamily="34" charset="-120"/>
               </a:rPr>
-              <a:t>6.NS.4</a:t>
+              <a:t>6.NOS.4</a:t>
             </a:r>
             <a:endParaRPr lang="en-US" sz="900" dirty="0"/>
           </a:p>
@@ -8239,7 +8239,7 @@
                 <a:ea typeface="Outfit" pitchFamily="34" charset="-122"/>
                 <a:cs typeface="Outfit" pitchFamily="34" charset="-120"/>
               </a:rPr>
-              <a:t>6.NS.4</a:t>
+              <a:t>6.NOS.4</a:t>
             </a:r>
             <a:endParaRPr lang="en-US" sz="900" dirty="0"/>
           </a:p>
@@ -9301,7 +9301,7 @@
                 <a:ea typeface="Outfit" pitchFamily="34" charset="-122"/>
                 <a:cs typeface="Outfit" pitchFamily="34" charset="-120"/>
               </a:rPr>
-              <a:t>6.NS.4</a:t>
+              <a:t>6.NOS.4</a:t>
             </a:r>
             <a:endParaRPr lang="en-US" sz="900" dirty="0"/>
           </a:p>
@@ -9978,7 +9978,7 @@
                 <a:ea typeface="Hanken Grotesk" pitchFamily="34" charset="-122"/>
                 <a:cs typeface="Hanken Grotesk" pitchFamily="34" charset="-120"/>
               </a:rPr>
-              <a:t>Hot dogs come in packs of 8 and buns in packs of 6. How does the LCM help you buy the fewest of each so none are left over?</a:t>
+              <a:t>Juice boxes come in packs of 6 and granola bars come in packs of 9 for the field trip snack table. How does the LCM help you buy the fewest of each so every student gets exactly one juice box and one granola bar with none left over?</a:t>
             </a:r>
             <a:endParaRPr lang="en-US" sz="1000" dirty="0"/>
           </a:p>
@@ -10266,7 +10266,7 @@
                 <a:ea typeface="Outfit" pitchFamily="34" charset="-122"/>
                 <a:cs typeface="Outfit" pitchFamily="34" charset="-120"/>
               </a:rPr>
-              <a:t>6.NS.4</a:t>
+              <a:t>6.NOS.4</a:t>
             </a:r>
             <a:endParaRPr lang="en-US" sz="900" dirty="0"/>
           </a:p>
@@ -11183,7 +11183,7 @@
                 <a:ea typeface="Outfit" pitchFamily="34" charset="-122"/>
                 <a:cs typeface="Outfit" pitchFamily="34" charset="-120"/>
               </a:rPr>
-              <a:t>6.NS.4</a:t>
+              <a:t>6.NOS.4</a:t>
             </a:r>
             <a:endParaRPr lang="en-US" sz="900" dirty="0"/>
           </a:p>
@@ -12311,7 +12311,7 @@
                 <a:ea typeface="Outfit" pitchFamily="34" charset="-122"/>
                 <a:cs typeface="Outfit" pitchFamily="34" charset="-120"/>
               </a:rPr>
-              <a:t>6.NS.4</a:t>
+              <a:t>6.NOS.4</a:t>
             </a:r>
             <a:endParaRPr lang="en-US" sz="900" dirty="0"/>
           </a:p>
@@ -13744,7 +13744,7 @@
                 <a:ea typeface="Outfit" pitchFamily="34" charset="-122"/>
                 <a:cs typeface="Outfit" pitchFamily="34" charset="-120"/>
               </a:rPr>
-              <a:t>6.NS.4</a:t>
+              <a:t>6.NOS.4</a:t>
             </a:r>
             <a:endParaRPr lang="en-US" sz="900" dirty="0"/>
           </a:p>
@@ -14558,7 +14558,7 @@
                 <a:ea typeface="Outfit" pitchFamily="34" charset="-122"/>
                 <a:cs typeface="Outfit" pitchFamily="34" charset="-120"/>
               </a:rPr>
-              <a:t>6.NS.4</a:t>
+              <a:t>6.NOS.4</a:t>
             </a:r>
             <a:endParaRPr lang="en-US" sz="900" dirty="0"/>
           </a:p>
@@ -15665,7 +15665,7 @@
                 <a:ea typeface="Outfit" pitchFamily="34" charset="-122"/>
                 <a:cs typeface="Outfit" pitchFamily="34" charset="-120"/>
               </a:rPr>
-              <a:t>6.NS.4</a:t>
+              <a:t>6.NOS.4</a:t>
             </a:r>
             <a:endParaRPr lang="en-US" sz="900" dirty="0"/>
           </a:p>
@@ -16772,7 +16772,7 @@
                 <a:ea typeface="Outfit" pitchFamily="34" charset="-122"/>
                 <a:cs typeface="Outfit" pitchFamily="34" charset="-120"/>
               </a:rPr>
-              <a:t>6.NS.4</a:t>
+              <a:t>6.NOS.4</a:t>
             </a:r>
             <a:endParaRPr lang="en-US" sz="900" dirty="0"/>
           </a:p>
@@ -17188,7 +17188,7 @@
                 <a:ea typeface="Hanken Grotesk" pitchFamily="34" charset="-122"/>
                 <a:cs typeface="Hanken Grotesk" pitchFamily="34" charset="-120"/>
               </a:rPr>
-              <a:t>Hot dogs come in packs of 8 and buns in packs of 6. How does the LCM help you buy the fewest of each so none are left over?</a:t>
+              <a:t>Juice boxes come in packs of 6 and granola bars come in packs of 9 for the field trip snack table. How does the LCM help you buy the fewest of each so every student gets exactly one juice box and one granola bar with none left over?</a:t>
             </a:r>
             <a:endParaRPr lang="en-US" sz="1400" dirty="0"/>
           </a:p>
@@ -17879,7 +17879,7 @@
                 <a:ea typeface="Outfit" pitchFamily="34" charset="-122"/>
                 <a:cs typeface="Outfit" pitchFamily="34" charset="-120"/>
               </a:rPr>
-              <a:t>6.NS.4</a:t>
+              <a:t>6.NOS.4</a:t>
             </a:r>
             <a:endParaRPr lang="en-US" sz="900" dirty="0"/>
           </a:p>
@@ -18986,7 +18986,7 @@
                 <a:ea typeface="Outfit" pitchFamily="34" charset="-122"/>
                 <a:cs typeface="Outfit" pitchFamily="34" charset="-120"/>
               </a:rPr>
-              <a:t>6.NS.4</a:t>
+              <a:t>6.NOS.4</a:t>
             </a:r>
             <a:endParaRPr lang="en-US" sz="900" dirty="0"/>
           </a:p>
@@ -20046,7 +20046,7 @@
                 <a:ea typeface="Outfit" pitchFamily="34" charset="-122"/>
                 <a:cs typeface="Outfit" pitchFamily="34" charset="-120"/>
               </a:rPr>
-              <a:t>6.NS.4</a:t>
+              <a:t>6.NOS.4</a:t>
             </a:r>
             <a:endParaRPr lang="en-US" sz="900" dirty="0"/>
           </a:p>
@@ -21014,7 +21014,7 @@
                 <a:ea typeface="Outfit" pitchFamily="34" charset="-122"/>
                 <a:cs typeface="Outfit" pitchFamily="34" charset="-120"/>
               </a:rPr>
-              <a:t>6.NS.4</a:t>
+              <a:t>6.NOS.4</a:t>
             </a:r>
             <a:endParaRPr lang="en-US" sz="900" dirty="0"/>
           </a:p>
